--- a/system-design-101/vi/lessons/sd-02-022/slides/sd-02-022.pptx
+++ b/system-design-101/vi/lessons/sd-02-022/slides/sd-02-022.pptx
@@ -9394,62 +9394,73 @@
               <a:buNone/>
             </a:pPr>
             <a:r>
+              <a:rPr lang="en-US" sz="1950" b="1" spc="302" kern="0" dirty="0">
+                <a:solidFill>
+                  <a:srgbClr val="B45309"/>
+                </a:solidFill>
+                <a:latin typeface="Be Vietnam Pro" pitchFamily="34" charset="0"/>
+                <a:ea typeface="Be Vietnam Pro" pitchFamily="34" charset="-122"/>
+                <a:cs typeface="Be Vietnam Pro" pitchFamily="34" charset="-120"/>
+              </a:rPr>
+              <a:t>HAI</a:t>
+            </a:r>
+            <a:r>
+              <a:rPr lang="en-US" sz="1950" b="1" spc="299" kern="0" dirty="0">
+                <a:solidFill>
+                  <a:srgbClr val="B45309"/>
+                </a:solidFill>
+                <a:latin typeface="Be Vietnam Pro" pitchFamily="34" charset="0"/>
+                <a:ea typeface="Be Vietnam Pro" pitchFamily="34" charset="-122"/>
+                <a:cs typeface="Be Vietnam Pro" pitchFamily="34" charset="-120"/>
+              </a:rPr>
+              <a:t> BƯỚC</a:t>
+            </a:r>
+            <a:r>
+              <a:rPr lang="en-US" sz="1950" b="1" spc="285" kern="0" dirty="0">
+                <a:solidFill>
+                  <a:srgbClr val="B45309"/>
+                </a:solidFill>
+                <a:latin typeface="Be Vietnam Pro" pitchFamily="34" charset="0"/>
+                <a:ea typeface="Be Vietnam Pro" pitchFamily="34" charset="-122"/>
+                <a:cs typeface="Be Vietnam Pro" pitchFamily="34" charset="-120"/>
+              </a:rPr>
+              <a:t> ĐẦU,</a:t>
+            </a:r>
+            <a:r>
+              <a:rPr lang="en-US" sz="1950" b="1" spc="301" kern="0" dirty="0">
+                <a:solidFill>
+                  <a:srgbClr val="B45309"/>
+                </a:solidFill>
+                <a:latin typeface="Be Vietnam Pro" pitchFamily="34" charset="0"/>
+                <a:ea typeface="Be Vietnam Pro" pitchFamily="34" charset="-122"/>
+                <a:cs typeface="Be Vietnam Pro" pitchFamily="34" charset="-120"/>
+              </a:rPr>
+              <a:t> HAI</a:t>
+            </a:r>
+            <a:r>
+              <a:rPr lang="en-US" sz="1950" b="1" spc="262" kern="0" dirty="0">
+                <a:solidFill>
+                  <a:srgbClr val="B45309"/>
+                </a:solidFill>
+                <a:latin typeface="Be Vietnam Pro" pitchFamily="34" charset="0"/>
+                <a:ea typeface="Be Vietnam Pro" pitchFamily="34" charset="-122"/>
+                <a:cs typeface="Be Vietnam Pro" pitchFamily="34" charset="-120"/>
+              </a:rPr>
+              <a:t> VẤN</a:t>
+            </a:r>
+            <a:r>
+              <a:rPr lang="en-US" sz="1950" b="1" spc="299" kern="0" dirty="0">
+                <a:solidFill>
+                  <a:srgbClr val="B45309"/>
+                </a:solidFill>
+                <a:latin typeface="Be Vietnam Pro" pitchFamily="34" charset="0"/>
+                <a:ea typeface="Be Vietnam Pro" pitchFamily="34" charset="-122"/>
+                <a:cs typeface="Be Vietnam Pro" pitchFamily="34" charset="-120"/>
+              </a:rPr>
+              <a:t> ĐỀ</a:t>
+            </a:r>
+            <a:r>
               <a:rPr lang="en-US" sz="1950" b="1" spc="300" kern="0" dirty="0">
-                <a:solidFill>
-                  <a:srgbClr val="B45309"/>
-                </a:solidFill>
-                <a:latin typeface="Be Vietnam Pro" pitchFamily="34" charset="0"/>
-                <a:ea typeface="Be Vietnam Pro" pitchFamily="34" charset="-122"/>
-                <a:cs typeface="Be Vietnam Pro" pitchFamily="34" charset="-120"/>
-              </a:rPr>
-              <a:t>MỖI</a:t>
-            </a:r>
-            <a:r>
-              <a:rPr lang="en-US" sz="1950" b="1" spc="299" kern="0" dirty="0">
-                <a:solidFill>
-                  <a:srgbClr val="B45309"/>
-                </a:solidFill>
-                <a:latin typeface="Be Vietnam Pro" pitchFamily="34" charset="0"/>
-                <a:ea typeface="Be Vietnam Pro" pitchFamily="34" charset="-122"/>
-                <a:cs typeface="Be Vietnam Pro" pitchFamily="34" charset="-120"/>
-              </a:rPr>
-              <a:t> BƯỚC</a:t>
-            </a:r>
-            <a:r>
-              <a:rPr lang="en-US" sz="1950" b="1" spc="276" kern="0" dirty="0">
-                <a:solidFill>
-                  <a:srgbClr val="B45309"/>
-                </a:solidFill>
-                <a:latin typeface="Be Vietnam Pro" pitchFamily="34" charset="0"/>
-                <a:ea typeface="Be Vietnam Pro" pitchFamily="34" charset="-122"/>
-                <a:cs typeface="Be Vietnam Pro" pitchFamily="34" charset="-120"/>
-              </a:rPr>
-              <a:t> MỘT</a:t>
-            </a:r>
-            <a:r>
-              <a:rPr lang="en-US" sz="1950" b="1" spc="262" kern="0" dirty="0">
-                <a:solidFill>
-                  <a:srgbClr val="B45309"/>
-                </a:solidFill>
-                <a:latin typeface="Be Vietnam Pro" pitchFamily="34" charset="0"/>
-                <a:ea typeface="Be Vietnam Pro" pitchFamily="34" charset="-122"/>
-                <a:cs typeface="Be Vietnam Pro" pitchFamily="34" charset="-120"/>
-              </a:rPr>
-              <a:t> VẤN</a:t>
-            </a:r>
-            <a:r>
-              <a:rPr lang="en-US" sz="1950" b="1" spc="300" kern="0" dirty="0">
-                <a:solidFill>
-                  <a:srgbClr val="B45309"/>
-                </a:solidFill>
-                <a:latin typeface="Be Vietnam Pro" pitchFamily="34" charset="0"/>
-                <a:ea typeface="Be Vietnam Pro" pitchFamily="34" charset="-122"/>
-                <a:cs typeface="Be Vietnam Pro" pitchFamily="34" charset="-120"/>
-              </a:rPr>
-              <a:t> ĐỀ</a:t>
-            </a:r>
-            <a:r>
-              <a:rPr lang="en-US" sz="1950" b="1" spc="299" kern="0" dirty="0">
                 <a:solidFill>
                   <a:srgbClr val="B45309"/>
                 </a:solidFill>
@@ -10133,6 +10144,50 @@
               <a:buNone/>
             </a:pPr>
             <a:r>
+              <a:rPr lang="en-US" sz="2550" dirty="0" spc="10" kern="0">
+                <a:solidFill>
+                  <a:srgbClr val="14161C"/>
+                </a:solidFill>
+                <a:latin typeface="Be Vietnam Pro" pitchFamily="34" charset="0"/>
+                <a:ea typeface="Be Vietnam Pro" pitchFamily="34" charset="-122"/>
+                <a:cs typeface="Be Vietnam Pro" pitchFamily="34" charset="-120"/>
+              </a:rPr>
+              <a:t>Bước</a:t>
+            </a:r>
+            <a:r>
+              <a:rPr lang="en-US" sz="2550" dirty="0" spc="-3" kern="0">
+                <a:solidFill>
+                  <a:srgbClr val="14161C"/>
+                </a:solidFill>
+                <a:latin typeface="Be Vietnam Pro" pitchFamily="34" charset="0"/>
+                <a:ea typeface="Be Vietnam Pro" pitchFamily="34" charset="-122"/>
+                <a:cs typeface="Be Vietnam Pro" pitchFamily="34" charset="-120"/>
+              </a:rPr>
+              <a:t> ba:</a:t>
+            </a:r>
+            <a:r>
+              <a:rPr lang="en-US" sz="2550" dirty="0" spc="1" kern="0">
+                <a:solidFill>
+                  <a:srgbClr val="14161C"/>
+                </a:solidFill>
+                <a:latin typeface="Be Vietnam Pro" pitchFamily="34" charset="0"/>
+                <a:ea typeface="Be Vietnam Pro" pitchFamily="34" charset="-122"/>
+                <a:cs typeface="Be Vietnam Pro" pitchFamily="34" charset="-120"/>
+              </a:rPr>
+              <a:t> nguồn</a:t>
+            </a:r>
+            <a:r>
+              <a:rPr lang="en-US" sz="2550" dirty="0" spc="6" kern="0">
+                <a:solidFill>
+                  <a:srgbClr val="14161C"/>
+                </a:solidFill>
+                <a:latin typeface="Be Vietnam Pro" pitchFamily="34" charset="0"/>
+                <a:ea typeface="Be Vietnam Pro" pitchFamily="34" charset="-122"/>
+                <a:cs typeface="Be Vietnam Pro" pitchFamily="34" charset="-120"/>
+              </a:rPr>
+              <a:t> chưa</a:t>
+            </a:r>
+            <a:r>
               <a:rPr lang="en-US" sz="2550" dirty="0" spc="-1" kern="0">
                 <a:solidFill>
                   <a:srgbClr val="14161C"/>
@@ -10141,10 +10196,10 @@
                 <a:ea typeface="Be Vietnam Pro" pitchFamily="34" charset="-122"/>
                 <a:cs typeface="Be Vietnam Pro" pitchFamily="34" charset="-120"/>
               </a:rPr>
-              <a:t>Giải</a:t>
-            </a:r>
-            <a:r>
-              <a:rPr lang="en-US" sz="2550" dirty="0" spc="0" kern="0">
+              <a:t> nói nó</a:t>
+            </a:r>
+            <a:r>
+              <a:rPr lang="en-US" sz="2550" dirty="0" spc="-2" kern="0">
                 <a:solidFill>
                   <a:srgbClr val="14161C"/>
                 </a:solidFill>
@@ -10152,10 +10207,10 @@
                 <a:ea typeface="Be Vietnam Pro" pitchFamily="34" charset="-122"/>
                 <a:cs typeface="Be Vietnam Pro" pitchFamily="34" charset="-120"/>
               </a:rPr>
-              <a:t> pháp</a:t>
-            </a:r>
-            <a:r>
-              <a:rPr lang="en-US" sz="2550" dirty="0" spc="-1" kern="0">
+              <a:t> sinh</a:t>
+            </a:r>
+            <a:r>
+              <a:rPr lang="en-US" sz="2550" dirty="0" spc="-14" kern="0">
                 <a:solidFill>
                   <a:srgbClr val="14161C"/>
                 </a:solidFill>
@@ -10163,10 +10218,10 @@
                 <a:ea typeface="Be Vietnam Pro" pitchFamily="34" charset="-122"/>
                 <a:cs typeface="Be Vietnam Pro" pitchFamily="34" charset="-120"/>
               </a:rPr>
-              <a:t> của</a:t>
-            </a:r>
-            <a:r>
-              <a:rPr lang="en-US" sz="2550" dirty="0" spc="6" kern="0">
+              <a:t> vấn</a:t>
+            </a:r>
+            <a:r>
+              <a:rPr lang="en-US" sz="2550" dirty="0" spc="18" kern="0">
                 <a:solidFill>
                   <a:srgbClr val="14161C"/>
                 </a:solidFill>
@@ -10174,10 +10229,10 @@
                 <a:ea typeface="Be Vietnam Pro" pitchFamily="34" charset="-122"/>
                 <a:cs typeface="Be Vietnam Pro" pitchFamily="34" charset="-120"/>
               </a:rPr>
-              <a:t> bước</a:t>
-            </a:r>
-            <a:r>
-              <a:rPr lang="en-US" sz="2550" dirty="0" spc="-10" kern="0">
+              <a:t> đề</a:t>
+            </a:r>
+            <a:r>
+              <a:rPr lang="en-US" sz="2550" dirty="0" spc="2" kern="0">
                 <a:solidFill>
                   <a:srgbClr val="14161C"/>
                 </a:solidFill>
@@ -10185,73 +10240,7 @@
                 <a:ea typeface="Be Vietnam Pro" pitchFamily="34" charset="-122"/>
                 <a:cs typeface="Be Vietnam Pro" pitchFamily="34" charset="-120"/>
               </a:rPr>
-              <a:t> này</a:t>
-            </a:r>
-            <a:r>
-              <a:rPr lang="en-US" sz="2550" dirty="0" spc="1" kern="0">
-                <a:solidFill>
-                  <a:srgbClr val="14161C"/>
-                </a:solidFill>
-                <a:latin typeface="Be Vietnam Pro" pitchFamily="34" charset="0"/>
-                <a:ea typeface="Be Vietnam Pro" pitchFamily="34" charset="-122"/>
-                <a:cs typeface="Be Vietnam Pro" pitchFamily="34" charset="-120"/>
-              </a:rPr>
-              <a:t> là</a:t>
-            </a:r>
-            <a:r>
-              <a:rPr lang="en-US" sz="2550" dirty="0" spc="-14" kern="0">
-                <a:solidFill>
-                  <a:srgbClr val="14161C"/>
-                </a:solidFill>
-                <a:latin typeface="Be Vietnam Pro" pitchFamily="34" charset="0"/>
-                <a:ea typeface="Be Vietnam Pro" pitchFamily="34" charset="-122"/>
-                <a:cs typeface="Be Vietnam Pro" pitchFamily="34" charset="-120"/>
-              </a:rPr>
-              <a:t> vấn</a:t>
-            </a:r>
-            <a:r>
-              <a:rPr lang="en-US" sz="2550" dirty="0" spc="18" kern="0">
-                <a:solidFill>
-                  <a:srgbClr val="14161C"/>
-                </a:solidFill>
-                <a:latin typeface="Be Vietnam Pro" pitchFamily="34" charset="0"/>
-                <a:ea typeface="Be Vietnam Pro" pitchFamily="34" charset="-122"/>
-                <a:cs typeface="Be Vietnam Pro" pitchFamily="34" charset="-120"/>
-              </a:rPr>
-              <a:t> đề</a:t>
-            </a:r>
-            <a:r>
-              <a:rPr lang="en-US" sz="2550" dirty="0" spc="-2" kern="0">
-                <a:solidFill>
-                  <a:srgbClr val="14161C"/>
-                </a:solidFill>
-                <a:latin typeface="Be Vietnam Pro" pitchFamily="34" charset="0"/>
-                <a:ea typeface="Be Vietnam Pro" pitchFamily="34" charset="-122"/>
-                <a:cs typeface="Be Vietnam Pro" pitchFamily="34" charset="-120"/>
-              </a:rPr>
-              <a:t> của</a:t>
-            </a:r>
-            <a:r>
-              <a:rPr lang="en-US" sz="2550" dirty="0" spc="7" kern="0">
-                <a:solidFill>
-                  <a:srgbClr val="14161C"/>
-                </a:solidFill>
-                <a:latin typeface="Be Vietnam Pro" pitchFamily="34" charset="0"/>
-                <a:ea typeface="Be Vietnam Pro" pitchFamily="34" charset="-122"/>
-                <a:cs typeface="Be Vietnam Pro" pitchFamily="34" charset="-120"/>
-              </a:rPr>
-              <a:t> bước</a:t>
-            </a:r>
-            <a:r>
-              <a:rPr lang="en-US" sz="2550" dirty="0" spc="-5" kern="0">
-                <a:solidFill>
-                  <a:srgbClr val="14161C"/>
-                </a:solidFill>
-                <a:latin typeface="Be Vietnam Pro" pitchFamily="34" charset="0"/>
-                <a:ea typeface="Be Vietnam Pro" pitchFamily="34" charset="-122"/>
-                <a:cs typeface="Be Vietnam Pro" pitchFamily="34" charset="-120"/>
-              </a:rPr>
-              <a:t> sau.</a:t>
+              <a:t> gì.</a:t>
             </a:r>
             <a:endParaRPr lang="en-US" sz="2550" dirty="0"/>
           </a:p>
